--- a/deck/Blinkit-Category-Exploration.pptx
+++ b/deck/Blinkit-Category-Exploration.pptx
@@ -3587,11 +3587,11 @@
         <p:spPr>
           <a:xfrm>
             <a:off x="7726680" y="1234440"/>
-            <a:ext cx="3977640" cy="2331720"/>
+            <a:ext cx="3977640" cy="2542032"/>
           </a:xfrm>
           <a:prstGeom prst="roundRect">
             <a:avLst>
-              <a:gd name="adj" fmla="val 3137"/>
+              <a:gd name="adj" fmla="val 2878"/>
             </a:avLst>
           </a:prstGeom>
           <a:solidFill>
@@ -3652,17 +3652,17 @@
         </p:nvSpPr>
         <p:spPr>
           <a:xfrm>
-            <a:off x="8001000" y="1737360"/>
-            <a:ext cx="3520440" cy="1737360"/>
-          </a:xfrm>
-          <a:prstGeom prst="rect">
-            <a:avLst/>
-          </a:prstGeom>
-          <a:noFill/>
-          <a:ln/>
-        </p:spPr>
-        <p:txBody>
-          <a:bodyPr wrap="square" lIns="0" tIns="0" rIns="0" bIns="0" rtlCol="0" anchor="ctr"/>
+            <a:off x="8001000" y="1792224"/>
+            <a:ext cx="3520440" cy="1920240"/>
+          </a:xfrm>
+          <a:prstGeom prst="rect">
+            <a:avLst/>
+          </a:prstGeom>
+          <a:noFill/>
+          <a:ln/>
+        </p:spPr>
+        <p:txBody>
+          <a:bodyPr wrap="square" lIns="0" tIns="0" rIns="0" bIns="0" rtlCol="0" anchor="t"/>
           <a:lstStyle/>
           <a:p>
             <a:pPr marL="342900" indent="-342900">
@@ -3723,7 +3723,7 @@
                 <a:ea typeface="Calibri" pitchFamily="34" charset="-122"/>
                 <a:cs typeface="Calibri" pitchFamily="34" charset="-120"/>
               </a:rPr>
-              <a:t>Both push on variables already non-zero — 39/40 already want to explore.</a:t>
+              <a:t>Both push variables already non-zero — 39/40 want to explore.</a:t>
             </a:r>
             <a:endParaRPr lang="en-US" sz="1400" dirty="0"/>
           </a:p>
@@ -3758,12 +3758,12 @@
         </p:nvSpPr>
         <p:spPr>
           <a:xfrm>
-            <a:off x="7726680" y="3730752"/>
-            <a:ext cx="3977640" cy="2194560"/>
+            <a:off x="7726680" y="3931920"/>
+            <a:ext cx="3977640" cy="1993392"/>
           </a:xfrm>
           <a:prstGeom prst="roundRect">
             <a:avLst>
-              <a:gd name="adj" fmla="val 3333"/>
+              <a:gd name="adj" fmla="val 3670"/>
             </a:avLst>
           </a:prstGeom>
           <a:solidFill>
@@ -3785,7 +3785,7 @@
         </p:nvSpPr>
         <p:spPr>
           <a:xfrm>
-            <a:off x="7955280" y="3840480"/>
+            <a:off x="7955280" y="4041648"/>
             <a:ext cx="3566160" cy="292608"/>
           </a:xfrm>
           <a:prstGeom prst="rect">
@@ -3824,17 +3824,17 @@
         </p:nvSpPr>
         <p:spPr>
           <a:xfrm>
-            <a:off x="7955280" y="4206240"/>
-            <a:ext cx="3566160" cy="1234440"/>
-          </a:xfrm>
-          <a:prstGeom prst="rect">
-            <a:avLst/>
-          </a:prstGeom>
-          <a:noFill/>
-          <a:ln/>
-        </p:spPr>
-        <p:txBody>
-          <a:bodyPr wrap="square" lIns="0" tIns="0" rIns="0" bIns="0" rtlCol="0" anchor="ctr"/>
+            <a:off x="7955280" y="4389120"/>
+            <a:ext cx="3566160" cy="914400"/>
+          </a:xfrm>
+          <a:prstGeom prst="rect">
+            <a:avLst/>
+          </a:prstGeom>
+          <a:noFill/>
+          <a:ln/>
+        </p:spPr>
+        <p:txBody>
+          <a:bodyPr wrap="square" lIns="0" tIns="0" rIns="0" bIns="0" rtlCol="0" anchor="t"/>
           <a:lstStyle/>
           <a:p>
             <a:pPr indent="0" marL="0">
@@ -3852,7 +3852,7 @@
                 <a:ea typeface="Calibri" pitchFamily="34" charset="-122"/>
                 <a:cs typeface="Calibri" pitchFamily="34" charset="-120"/>
               </a:rPr>
-              <a:t>Narrow basket  →  faster session  →  “the app is a fetch tool”  →  shorter time budget  →  no reference point for an unfamiliar price  →  less exploration  →  narrower basket</a:t>
+              <a:t>Narrow basket  →  faster session  →  “a fetch tool, not a browse tool”  →  no reference point for an unfamiliar price  →  less exploration  →  narrower basket</a:t>
             </a:r>
             <a:endParaRPr lang="en-US" sz="1400" dirty="0"/>
           </a:p>
@@ -3866,17 +3866,17 @@
         </p:nvSpPr>
         <p:spPr>
           <a:xfrm>
-            <a:off x="7955280" y="5394960"/>
-            <a:ext cx="3566160" cy="502920"/>
-          </a:xfrm>
-          <a:prstGeom prst="rect">
-            <a:avLst/>
-          </a:prstGeom>
-          <a:noFill/>
-          <a:ln/>
-        </p:spPr>
-        <p:txBody>
-          <a:bodyPr wrap="square" lIns="0" tIns="0" rIns="0" bIns="0" rtlCol="0" anchor="ctr"/>
+            <a:off x="7955280" y="5349240"/>
+            <a:ext cx="3566160" cy="457200"/>
+          </a:xfrm>
+          <a:prstGeom prst="rect">
+            <a:avLst/>
+          </a:prstGeom>
+          <a:noFill/>
+          <a:ln/>
+        </p:spPr>
+        <p:txBody>
+          <a:bodyPr wrap="square" lIns="0" tIns="0" rIns="0" bIns="0" rtlCol="0" anchor="t"/>
           <a:lstStyle/>
           <a:p>
             <a:pPr indent="0" marL="0">
@@ -3930,7 +3930,7 @@
                 <a:ea typeface="Calibri" pitchFamily="34" charset="-122"/>
                 <a:cs typeface="Calibri" pitchFamily="34" charset="-120"/>
               </a:rPr>
-              <a:t>Fogg: B = Motivation × Ability × Prompt.  Motivation 39/40 present · Prompt present · Ability is the binding constraint.</a:t>
+              <a:t>Fogg: B = M × A × P.  Motivation 39/40 present · Prompt present · Ability is the binding constraint.</a:t>
             </a:r>
             <a:endParaRPr lang="en-US" sz="1400" dirty="0"/>
           </a:p>
@@ -4634,7 +4634,7 @@
         </p:nvSpPr>
         <p:spPr>
           <a:xfrm>
-            <a:off x="667512" y="3072384"/>
+            <a:off x="667512" y="3127248"/>
             <a:ext cx="2377440" cy="914400"/>
           </a:xfrm>
           <a:prstGeom prst="rect">
@@ -4767,7 +4767,7 @@
                 <a:ea typeface="Calibri" pitchFamily="34" charset="-122"/>
                 <a:cs typeface="Calibri" pitchFamily="34" charset="-120"/>
               </a:rPr>
-              <a:t>judged relevant (28.8%)</a:t>
+              <a:t>relevant — 28.8%</a:t>
             </a:r>
             <a:endParaRPr lang="en-US" sz="1400" dirty="0"/>
           </a:p>
@@ -4781,7 +4781,7 @@
         </p:nvSpPr>
         <p:spPr>
           <a:xfrm>
-            <a:off x="3520440" y="3072384"/>
+            <a:off x="3520440" y="3127248"/>
             <a:ext cx="2377440" cy="914400"/>
           </a:xfrm>
           <a:prstGeom prst="rect">
@@ -4914,7 +4914,7 @@
                 <a:ea typeface="Calibri" pitchFamily="34" charset="-122"/>
                 <a:cs typeface="Calibri" pitchFamily="34" charset="-120"/>
               </a:rPr>
-              <a:t>themes, none degenerate</a:t>
+              <a:t>interpretable themes</a:t>
             </a:r>
             <a:endParaRPr lang="en-US" sz="1400" dirty="0"/>
           </a:p>
@@ -4928,7 +4928,7 @@
         </p:nvSpPr>
         <p:spPr>
           <a:xfrm>
-            <a:off x="6373368" y="3072384"/>
+            <a:off x="6373368" y="3127248"/>
             <a:ext cx="2377440" cy="914400"/>
           </a:xfrm>
           <a:prstGeom prst="rect">
@@ -5061,7 +5061,7 @@
                 <a:ea typeface="Calibri" pitchFamily="34" charset="-122"/>
                 <a:cs typeface="Calibri" pitchFamily="34" charset="-120"/>
               </a:rPr>
-              <a:t>quote fabrication rate</a:t>
+              <a:t>fabrication rate</a:t>
             </a:r>
             <a:endParaRPr lang="en-US" sz="1400" dirty="0"/>
           </a:p>
@@ -5075,7 +5075,7 @@
         </p:nvSpPr>
         <p:spPr>
           <a:xfrm>
-            <a:off x="9226296" y="3072384"/>
+            <a:off x="9226296" y="3127248"/>
             <a:ext cx="2377440" cy="914400"/>
           </a:xfrm>
           <a:prstGeom prst="rect">
@@ -5183,8 +5183,8 @@
         </p:nvSpPr>
         <p:spPr>
           <a:xfrm>
-            <a:off x="758952" y="4645152"/>
-            <a:ext cx="5029200" cy="1234440"/>
+            <a:off x="758952" y="4718304"/>
+            <a:ext cx="5029200" cy="1188720"/>
           </a:xfrm>
           <a:prstGeom prst="rect">
             <a:avLst/>
@@ -5320,7 +5320,7 @@
                 <a:ea typeface="Calibri" pitchFamily="34" charset="-122"/>
                 <a:cs typeface="Calibri" pitchFamily="34" charset="-120"/>
               </a:rPr>
-              <a:t>The filter’s error, found by interview and then measured</a:t>
+              <a:t>The filter’s error, found by interview</a:t>
             </a:r>
             <a:endParaRPr lang="en-US" sz="1400" dirty="0"/>
           </a:p>
@@ -5334,8 +5334,8 @@
         </p:nvSpPr>
         <p:spPr>
           <a:xfrm>
-            <a:off x="6473952" y="4645152"/>
-            <a:ext cx="5029200" cy="1234440"/>
+            <a:off x="6473952" y="4718304"/>
+            <a:ext cx="5029200" cy="1188720"/>
           </a:xfrm>
           <a:prstGeom prst="rect">
             <a:avLst/>
@@ -5410,7 +5410,7 @@
                   </a:extLst>
                 </a:hlinkClick>
               </a:rPr>
-              <a:t>Corpus is app-store review text only — Play Store 3,033 · App Store 339. A Reddit collector is built but returned no documents.</a:t>
+              <a:t>Corpus is app-store review text only — Play Store 3,033 · App Store 339.</a:t>
             </a:r>
             <a:endParaRPr lang="en-US" sz="1400" dirty="0"/>
           </a:p>
@@ -5533,7 +5533,7 @@
                 <a:ea typeface="Cambria" pitchFamily="34" charset="-122"/>
                 <a:cs typeface="Cambria" pitchFamily="34" charset="-120"/>
               </a:rPr>
-              <a:t>Trying to break our own insights: 3 checks pass, 2 report NOT RUN</a:t>
+              <a:t>Trying to break our own insights: 3 pass, 2 report NOT RUN</a:t>
             </a:r>
             <a:endParaRPr lang="en-US" sz="2300" dirty="0"/>
           </a:p>
@@ -6393,11 +6393,11 @@
         <p:spPr>
           <a:xfrm>
             <a:off x="8092440" y="1188720"/>
-            <a:ext cx="3611880" cy="2331720"/>
+            <a:ext cx="3611880" cy="2578608"/>
           </a:xfrm>
           <a:prstGeom prst="roundRect">
             <a:avLst>
-              <a:gd name="adj" fmla="val 3137"/>
+              <a:gd name="adj" fmla="val 2837"/>
             </a:avLst>
           </a:prstGeom>
           <a:solidFill>
@@ -6500,8 +6500,8 @@
         </p:nvSpPr>
         <p:spPr>
           <a:xfrm>
-            <a:off x="8302752" y="3017520"/>
-            <a:ext cx="3200400" cy="457200"/>
+            <a:off x="8302752" y="3127248"/>
+            <a:ext cx="3200400" cy="502920"/>
           </a:xfrm>
           <a:prstGeom prst="rect">
             <a:avLst/>
@@ -6539,12 +6539,12 @@
         </p:nvSpPr>
         <p:spPr>
           <a:xfrm>
-            <a:off x="8092440" y="3675888"/>
-            <a:ext cx="3611880" cy="2286000"/>
+            <a:off x="8092440" y="3913632"/>
+            <a:ext cx="3611880" cy="2057400"/>
           </a:xfrm>
           <a:prstGeom prst="roundRect">
             <a:avLst>
-              <a:gd name="adj" fmla="val 3200"/>
+              <a:gd name="adj" fmla="val 3556"/>
             </a:avLst>
           </a:prstGeom>
           <a:solidFill>
@@ -6566,7 +6566,7 @@
         </p:nvSpPr>
         <p:spPr>
           <a:xfrm>
-            <a:off x="8302752" y="3803904"/>
+            <a:off x="8302752" y="4041648"/>
             <a:ext cx="3200400" cy="292608"/>
           </a:xfrm>
           <a:prstGeom prst="rect">
@@ -6605,8 +6605,8 @@
         </p:nvSpPr>
         <p:spPr>
           <a:xfrm>
-            <a:off x="8302752" y="4151376"/>
-            <a:ext cx="3200400" cy="1691640"/>
+            <a:off x="8302752" y="4389120"/>
+            <a:ext cx="3200400" cy="1463040"/>
           </a:xfrm>
           <a:prstGeom prst="rect">
             <a:avLst/>
@@ -6633,7 +6633,7 @@
                 <a:ea typeface="Calibri" pitchFamily="34" charset="-122"/>
                 <a:cs typeface="Calibri" pitchFamily="34" charset="-120"/>
               </a:rPr>
-              <a:t>Two of these checks used to print PASS over zero observations. A green line standing for no evidence is worse than an honest gap — it is the one failure mode that survives review. Three checks pass, two abstain, and the deck says which.</a:t>
+              <a:t>Two of these used to print PASS over zero observations. A green line standing for no evidence is worse than an honest gap. Three pass, two abstain, and the deck says which.</a:t>
             </a:r>
             <a:endParaRPr lang="en-US" sz="1400" dirty="0"/>
           </a:p>
@@ -7356,22 +7356,19 @@
         <p:spPr>
           <a:xfrm>
             <a:off x="502920" y="4315968"/>
-            <a:ext cx="11201400" cy="457200"/>
-          </a:xfrm>
-          <a:prstGeom prst="rect">
-            <a:avLst/>
-          </a:prstGeom>
-          <a:noFill/>
-          <a:ln/>
-        </p:spPr>
-        <p:txBody>
-          <a:bodyPr wrap="square" lIns="0" tIns="0" rIns="0" bIns="0" rtlCol="0" anchor="ctr"/>
-          <a:lstStyle/>
-          <a:p>
-            <a:pPr indent="0" marL="0">
-              <a:lnSpc>
-                <a:spcPts val="1800"/>
-              </a:lnSpc>
+            <a:ext cx="11201400" cy="411480"/>
+          </a:xfrm>
+          <a:prstGeom prst="rect">
+            <a:avLst/>
+          </a:prstGeom>
+          <a:noFill/>
+          <a:ln/>
+        </p:spPr>
+        <p:txBody>
+          <a:bodyPr wrap="square" lIns="0" tIns="0" rIns="0" bIns="0" rtlCol="0" anchor="t"/>
+          <a:lstStyle/>
+          <a:p>
+            <a:pPr indent="0" marL="0">
               <a:buNone/>
             </a:pPr>
             <a:r>
@@ -7383,7 +7380,7 @@
                 <a:ea typeface="Calibri" pitchFamily="34" charset="-122"/>
                 <a:cs typeface="Calibri" pitchFamily="34" charset="-120"/>
               </a:rPr>
-              <a:t>A corpus of reviews contains only people who completed a transaction. Every barrier that stops someone before they buy is invisible to it — not because the sample was small, but because the behaviour generates no text.</a:t>
+              <a:t>A corpus of reviews contains only people who completed a transaction. Every barrier that stops someone before they buy generates no text at all.</a:t>
             </a:r>
             <a:endParaRPr lang="en-US" sz="1400" dirty="0"/>
           </a:p>
@@ -7397,12 +7394,12 @@
         </p:nvSpPr>
         <p:spPr>
           <a:xfrm>
-            <a:off x="502920" y="4846320"/>
-            <a:ext cx="5532120" cy="1170432"/>
+            <a:off x="502920" y="4882896"/>
+            <a:ext cx="5532120" cy="1188720"/>
           </a:xfrm>
           <a:prstGeom prst="roundRect">
             <a:avLst>
-              <a:gd name="adj" fmla="val 6250"/>
+              <a:gd name="adj" fmla="val 6154"/>
             </a:avLst>
           </a:prstGeom>
           <a:solidFill>
@@ -7424,7 +7421,7 @@
         </p:nvSpPr>
         <p:spPr>
           <a:xfrm>
-            <a:off x="713232" y="4956048"/>
+            <a:off x="713232" y="4992624"/>
             <a:ext cx="5120640" cy="274320"/>
           </a:xfrm>
           <a:prstGeom prst="rect">
@@ -7463,17 +7460,17 @@
         </p:nvSpPr>
         <p:spPr>
           <a:xfrm>
-            <a:off x="713232" y="5248656"/>
-            <a:ext cx="5120640" cy="713232"/>
-          </a:xfrm>
-          <a:prstGeom prst="rect">
-            <a:avLst/>
-          </a:prstGeom>
-          <a:noFill/>
-          <a:ln/>
-        </p:spPr>
-        <p:txBody>
-          <a:bodyPr wrap="square" lIns="0" tIns="0" rIns="0" bIns="0" rtlCol="0" anchor="ctr"/>
+            <a:off x="713232" y="5303520"/>
+            <a:ext cx="5120640" cy="731520"/>
+          </a:xfrm>
+          <a:prstGeom prst="rect">
+            <a:avLst/>
+          </a:prstGeom>
+          <a:noFill/>
+          <a:ln/>
+        </p:spPr>
+        <p:txBody>
+          <a:bodyPr wrap="square" lIns="0" tIns="0" rIns="0" bIns="0" rtlCol="0" anchor="t"/>
           <a:lstStyle/>
           <a:p>
             <a:pPr indent="0" marL="0">
@@ -7491,7 +7488,7 @@
                 <a:ea typeface="Calibri" pitchFamily="34" charset="-122"/>
                 <a:cs typeface="Calibri" pitchFamily="34" charset="-120"/>
               </a:rPr>
-              <a:t>Barrier ranking matches across two independent datasets. Engine: trust/quality 45.3%, price risk 22.7%, awareness 4.8%. Survey puts the same three in the same order.</a:t>
+              <a:t>Barrier ranking matches across two independent datasets. Engine: trust/quality 45.3%, price risk 22.7%, awareness 4.8% — the survey ranks them identically.</a:t>
             </a:r>
             <a:endParaRPr lang="en-US" sz="1400" dirty="0"/>
           </a:p>
@@ -7505,12 +7502,12 @@
         </p:nvSpPr>
         <p:spPr>
           <a:xfrm>
-            <a:off x="6263640" y="4846320"/>
-            <a:ext cx="5440680" cy="1170432"/>
+            <a:off x="6263640" y="4882896"/>
+            <a:ext cx="5440680" cy="1188720"/>
           </a:xfrm>
           <a:prstGeom prst="roundRect">
             <a:avLst>
-              <a:gd name="adj" fmla="val 6250"/>
+              <a:gd name="adj" fmla="val 6154"/>
             </a:avLst>
           </a:prstGeom>
           <a:solidFill>
@@ -7532,7 +7529,7 @@
         </p:nvSpPr>
         <p:spPr>
           <a:xfrm>
-            <a:off x="6473952" y="4956048"/>
+            <a:off x="6473952" y="4992624"/>
             <a:ext cx="5029200" cy="274320"/>
           </a:xfrm>
           <a:prstGeom prst="rect">
@@ -7571,17 +7568,17 @@
         </p:nvSpPr>
         <p:spPr>
           <a:xfrm>
-            <a:off x="6473952" y="5248656"/>
-            <a:ext cx="5029200" cy="713232"/>
-          </a:xfrm>
-          <a:prstGeom prst="rect">
-            <a:avLst/>
-          </a:prstGeom>
-          <a:noFill/>
-          <a:ln/>
-        </p:spPr>
-        <p:txBody>
-          <a:bodyPr wrap="square" lIns="0" tIns="0" rIns="0" bIns="0" rtlCol="0" anchor="ctr"/>
+            <a:off x="6473952" y="5303520"/>
+            <a:ext cx="5029200" cy="731520"/>
+          </a:xfrm>
+          <a:prstGeom prst="rect">
+            <a:avLst/>
+          </a:prstGeom>
+          <a:noFill/>
+          <a:ln/>
+        </p:spPr>
+        <p:txBody>
+          <a:bodyPr wrap="square" lIns="0" tIns="0" rIns="0" bIns="0" rtlCol="0" anchor="t"/>
           <a:lstStyle/>
           <a:p>
             <a:pPr indent="0" marL="0">
@@ -7802,17 +7799,17 @@
         </p:nvSpPr>
         <p:spPr>
           <a:xfrm>
-            <a:off x="758952" y="1627632"/>
-            <a:ext cx="3108960" cy="1600200"/>
-          </a:xfrm>
-          <a:prstGeom prst="rect">
-            <a:avLst/>
-          </a:prstGeom>
-          <a:noFill/>
-          <a:ln/>
-        </p:spPr>
-        <p:txBody>
-          <a:bodyPr wrap="square" lIns="0" tIns="0" rIns="0" bIns="0" rtlCol="0" anchor="ctr"/>
+            <a:off x="758952" y="1664208"/>
+            <a:ext cx="3108960" cy="1572768"/>
+          </a:xfrm>
+          <a:prstGeom prst="rect">
+            <a:avLst/>
+          </a:prstGeom>
+          <a:noFill/>
+          <a:ln/>
+        </p:spPr>
+        <p:txBody>
+          <a:bodyPr wrap="square" lIns="0" tIns="0" rIns="0" bIns="0" rtlCol="0" anchor="t"/>
           <a:lstStyle/>
           <a:p>
             <a:pPr marL="342900" indent="-342900">
@@ -7831,7 +7828,7 @@
                 <a:ea typeface="Calibri" pitchFamily="34" charset="-122"/>
                 <a:cs typeface="Calibri" pitchFamily="34" charset="-120"/>
               </a:rPr>
-              <a:t>≥3 orders / month  —  27 of 40</a:t>
+              <a:t>≥3 orders/month (27 of 40)</a:t>
             </a:r>
             <a:endParaRPr lang="en-US" sz="1400" dirty="0"/>
           </a:p>
@@ -7852,7 +7849,7 @@
                 <a:ea typeface="Calibri" pitchFamily="34" charset="-122"/>
                 <a:cs typeface="Calibri" pitchFamily="34" charset="-120"/>
               </a:rPr>
-              <a:t>≥6 months tenure  —  majority</a:t>
+              <a:t>≥6 months tenure</a:t>
             </a:r>
             <a:endParaRPr lang="en-US" sz="1400" dirty="0"/>
           </a:p>
@@ -7894,7 +7891,7 @@
                 <a:ea typeface="Calibri" pitchFamily="34" charset="-122"/>
                 <a:cs typeface="Calibri" pitchFamily="34" charset="-120"/>
               </a:rPr>
-              <a:t>Already acquired, already trusting, already transacting — so the blocker is behavioural, the only kind a feature can move.</a:t>
+              <a:t>Already acquired and transacting — the blocker is behavioural.</a:t>
             </a:r>
             <a:endParaRPr lang="en-US" sz="1400" dirty="0"/>
           </a:p>
@@ -8095,11 +8092,11 @@
         <p:spPr>
           <a:xfrm>
             <a:off x="502920" y="3877056"/>
-            <a:ext cx="2697480" cy="1600200"/>
+            <a:ext cx="2697480" cy="1700784"/>
           </a:xfrm>
           <a:prstGeom prst="roundRect">
             <a:avLst>
-              <a:gd name="adj" fmla="val 4571"/>
+              <a:gd name="adj" fmla="val 4301"/>
             </a:avLst>
           </a:prstGeom>
           <a:solidFill>
@@ -8170,7 +8167,7 @@
           <a:ln/>
         </p:spPr>
         <p:txBody>
-          <a:bodyPr wrap="square" lIns="0" tIns="0" rIns="0" bIns="0" rtlCol="0" anchor="ctr"/>
+          <a:bodyPr wrap="square" lIns="0" tIns="0" rIns="0" bIns="0" rtlCol="0" anchor="t"/>
           <a:lstStyle/>
           <a:p>
             <a:pPr indent="0" marL="0">
@@ -8202,17 +8199,17 @@
         </p:nvSpPr>
         <p:spPr>
           <a:xfrm>
-            <a:off x="667512" y="4718304"/>
-            <a:ext cx="2377440" cy="658368"/>
-          </a:xfrm>
-          <a:prstGeom prst="rect">
-            <a:avLst/>
-          </a:prstGeom>
-          <a:noFill/>
-          <a:ln/>
-        </p:spPr>
-        <p:txBody>
-          <a:bodyPr wrap="square" lIns="0" tIns="0" rIns="0" bIns="0" rtlCol="0" anchor="ctr"/>
+            <a:off x="667512" y="4791456"/>
+            <a:ext cx="2377440" cy="731520"/>
+          </a:xfrm>
+          <a:prstGeom prst="rect">
+            <a:avLst/>
+          </a:prstGeom>
+          <a:noFill/>
+          <a:ln/>
+        </p:spPr>
+        <p:txBody>
+          <a:bodyPr wrap="square" lIns="0" tIns="0" rIns="0" bIns="0" rtlCol="0" anchor="t"/>
           <a:lstStyle/>
           <a:p>
             <a:pPr indent="0" marL="0">
@@ -8245,11 +8242,11 @@
         <p:spPr>
           <a:xfrm>
             <a:off x="3355848" y="3877056"/>
-            <a:ext cx="2697480" cy="1600200"/>
+            <a:ext cx="2697480" cy="1700784"/>
           </a:xfrm>
           <a:prstGeom prst="roundRect">
             <a:avLst>
-              <a:gd name="adj" fmla="val 4571"/>
+              <a:gd name="adj" fmla="val 4301"/>
             </a:avLst>
           </a:prstGeom>
           <a:solidFill>
@@ -8320,7 +8317,7 @@
           <a:ln/>
         </p:spPr>
         <p:txBody>
-          <a:bodyPr wrap="square" lIns="0" tIns="0" rIns="0" bIns="0" rtlCol="0" anchor="ctr"/>
+          <a:bodyPr wrap="square" lIns="0" tIns="0" rIns="0" bIns="0" rtlCol="0" anchor="t"/>
           <a:lstStyle/>
           <a:p>
             <a:pPr indent="0" marL="0">
@@ -8352,17 +8349,17 @@
         </p:nvSpPr>
         <p:spPr>
           <a:xfrm>
-            <a:off x="3520440" y="4718304"/>
-            <a:ext cx="2377440" cy="658368"/>
-          </a:xfrm>
-          <a:prstGeom prst="rect">
-            <a:avLst/>
-          </a:prstGeom>
-          <a:noFill/>
-          <a:ln/>
-        </p:spPr>
-        <p:txBody>
-          <a:bodyPr wrap="square" lIns="0" tIns="0" rIns="0" bIns="0" rtlCol="0" anchor="ctr"/>
+            <a:off x="3520440" y="4791456"/>
+            <a:ext cx="2377440" cy="731520"/>
+          </a:xfrm>
+          <a:prstGeom prst="rect">
+            <a:avLst/>
+          </a:prstGeom>
+          <a:noFill/>
+          <a:ln/>
+        </p:spPr>
+        <p:txBody>
+          <a:bodyPr wrap="square" lIns="0" tIns="0" rIns="0" bIns="0" rtlCol="0" anchor="t"/>
           <a:lstStyle/>
           <a:p>
             <a:pPr indent="0" marL="0">
@@ -8395,11 +8392,11 @@
         <p:spPr>
           <a:xfrm>
             <a:off x="6208776" y="3877056"/>
-            <a:ext cx="2697480" cy="1600200"/>
+            <a:ext cx="2697480" cy="1700784"/>
           </a:xfrm>
           <a:prstGeom prst="roundRect">
             <a:avLst>
-              <a:gd name="adj" fmla="val 4571"/>
+              <a:gd name="adj" fmla="val 4301"/>
             </a:avLst>
           </a:prstGeom>
           <a:solidFill>
@@ -8446,7 +8443,7 @@
                 <a:ea typeface="Calibri" pitchFamily="34" charset="-122"/>
                 <a:cs typeface="Calibri" pitchFamily="34" charset="-120"/>
               </a:rPr>
-              <a:t>Validate outside the app</a:t>
+              <a:t>Validate elsewhere</a:t>
             </a:r>
             <a:endParaRPr lang="en-US" sz="1400" dirty="0"/>
           </a:p>
@@ -8470,7 +8467,7 @@
           <a:ln/>
         </p:spPr>
         <p:txBody>
-          <a:bodyPr wrap="square" lIns="0" tIns="0" rIns="0" bIns="0" rtlCol="0" anchor="ctr"/>
+          <a:bodyPr wrap="square" lIns="0" tIns="0" rIns="0" bIns="0" rtlCol="0" anchor="t"/>
           <a:lstStyle/>
           <a:p>
             <a:pPr indent="0" marL="0">
@@ -8502,17 +8499,17 @@
         </p:nvSpPr>
         <p:spPr>
           <a:xfrm>
-            <a:off x="6373368" y="4718304"/>
-            <a:ext cx="2377440" cy="658368"/>
-          </a:xfrm>
-          <a:prstGeom prst="rect">
-            <a:avLst/>
-          </a:prstGeom>
-          <a:noFill/>
-          <a:ln/>
-        </p:spPr>
-        <p:txBody>
-          <a:bodyPr wrap="square" lIns="0" tIns="0" rIns="0" bIns="0" rtlCol="0" anchor="ctr"/>
+            <a:off x="6373368" y="4791456"/>
+            <a:ext cx="2377440" cy="731520"/>
+          </a:xfrm>
+          <a:prstGeom prst="rect">
+            <a:avLst/>
+          </a:prstGeom>
+          <a:noFill/>
+          <a:ln/>
+        </p:spPr>
+        <p:txBody>
+          <a:bodyPr wrap="square" lIns="0" tIns="0" rIns="0" bIns="0" rtlCol="0" anchor="t"/>
           <a:lstStyle/>
           <a:p>
             <a:pPr indent="0" marL="0">
@@ -8545,11 +8542,11 @@
         <p:spPr>
           <a:xfrm>
             <a:off x="9061704" y="3877056"/>
-            <a:ext cx="2697480" cy="1600200"/>
+            <a:ext cx="2697480" cy="1700784"/>
           </a:xfrm>
           <a:prstGeom prst="roundRect">
             <a:avLst>
-              <a:gd name="adj" fmla="val 4571"/>
+              <a:gd name="adj" fmla="val 4301"/>
             </a:avLst>
           </a:prstGeom>
           <a:solidFill>
@@ -8620,7 +8617,7 @@
           <a:ln/>
         </p:spPr>
         <p:txBody>
-          <a:bodyPr wrap="square" lIns="0" tIns="0" rIns="0" bIns="0" rtlCol="0" anchor="ctr"/>
+          <a:bodyPr wrap="square" lIns="0" tIns="0" rIns="0" bIns="0" rtlCol="0" anchor="t"/>
           <a:lstStyle/>
           <a:p>
             <a:pPr indent="0" marL="0">
@@ -8652,17 +8649,17 @@
         </p:nvSpPr>
         <p:spPr>
           <a:xfrm>
-            <a:off x="9226296" y="4718304"/>
-            <a:ext cx="2377440" cy="658368"/>
-          </a:xfrm>
-          <a:prstGeom prst="rect">
-            <a:avLst/>
-          </a:prstGeom>
-          <a:noFill/>
-          <a:ln/>
-        </p:spPr>
-        <p:txBody>
-          <a:bodyPr wrap="square" lIns="0" tIns="0" rIns="0" bIns="0" rtlCol="0" anchor="ctr"/>
+            <a:off x="9226296" y="4791456"/>
+            <a:ext cx="2377440" cy="731520"/>
+          </a:xfrm>
+          <a:prstGeom prst="rect">
+            <a:avLst/>
+          </a:prstGeom>
+          <a:noFill/>
+          <a:ln/>
+        </p:spPr>
+        <p:txBody>
+          <a:bodyPr wrap="square" lIns="0" tIns="0" rIns="0" bIns="0" rtlCol="0" anchor="t"/>
           <a:lstStyle/>
           <a:p>
             <a:pPr indent="0" marL="0">
@@ -8694,23 +8691,20 @@
         </p:nvSpPr>
         <p:spPr>
           <a:xfrm>
-            <a:off x="502920" y="5650992"/>
-            <a:ext cx="11201400" cy="457200"/>
-          </a:xfrm>
-          <a:prstGeom prst="rect">
-            <a:avLst/>
-          </a:prstGeom>
-          <a:noFill/>
-          <a:ln/>
-        </p:spPr>
-        <p:txBody>
-          <a:bodyPr wrap="square" lIns="0" tIns="0" rIns="0" bIns="0" rtlCol="0" anchor="ctr"/>
-          <a:lstStyle/>
-          <a:p>
-            <a:pPr indent="0" marL="0">
-              <a:lnSpc>
-                <a:spcPts val="1800"/>
-              </a:lnSpc>
+            <a:off x="502920" y="5724144"/>
+            <a:ext cx="11201400" cy="411480"/>
+          </a:xfrm>
+          <a:prstGeom prst="rect">
+            <a:avLst/>
+          </a:prstGeom>
+          <a:noFill/>
+          <a:ln/>
+        </p:spPr>
+        <p:txBody>
+          <a:bodyPr wrap="square" lIns="0" tIns="0" rIns="0" bIns="0" rtlCol="0" anchor="t"/>
+          <a:lstStyle/>
+          <a:p>
+            <a:pPr indent="0" marL="0">
               <a:buNone/>
             </a:pPr>
             <a:r>
@@ -8860,11 +8854,11 @@
         <p:spPr>
           <a:xfrm>
             <a:off x="502920" y="1188720"/>
-            <a:ext cx="3200400" cy="914400"/>
+            <a:ext cx="3200400" cy="987552"/>
           </a:xfrm>
           <a:prstGeom prst="roundRect">
             <a:avLst>
-              <a:gd name="adj" fmla="val 8000"/>
+              <a:gd name="adj" fmla="val 7407"/>
             </a:avLst>
           </a:prstGeom>
           <a:solidFill>
@@ -8887,7 +8881,7 @@
         <p:spPr>
           <a:xfrm>
             <a:off x="685800" y="1280160"/>
-            <a:ext cx="2834640" cy="256032"/>
+            <a:ext cx="2834640" cy="274320"/>
           </a:xfrm>
           <a:prstGeom prst="rect">
             <a:avLst/>
@@ -8925,7 +8919,7 @@
         </p:nvSpPr>
         <p:spPr>
           <a:xfrm>
-            <a:off x="685800" y="1536192"/>
+            <a:off x="685800" y="1609344"/>
             <a:ext cx="2834640" cy="502920"/>
           </a:xfrm>
           <a:prstGeom prst="rect">
@@ -8968,11 +8962,11 @@
         <p:spPr>
           <a:xfrm>
             <a:off x="3977640" y="1188720"/>
-            <a:ext cx="3200400" cy="914400"/>
+            <a:ext cx="3200400" cy="987552"/>
           </a:xfrm>
           <a:prstGeom prst="roundRect">
             <a:avLst>
-              <a:gd name="adj" fmla="val 8000"/>
+              <a:gd name="adj" fmla="val 7407"/>
             </a:avLst>
           </a:prstGeom>
           <a:solidFill>
@@ -8995,7 +8989,7 @@
         <p:spPr>
           <a:xfrm>
             <a:off x="4160520" y="1280160"/>
-            <a:ext cx="2834640" cy="256032"/>
+            <a:ext cx="2834640" cy="274320"/>
           </a:xfrm>
           <a:prstGeom prst="rect">
             <a:avLst/>
@@ -9019,7 +9013,7 @@
                 <a:ea typeface="Calibri" pitchFamily="34" charset="-122"/>
                 <a:cs typeface="Calibri" pitchFamily="34" charset="-120"/>
               </a:rPr>
-              <a:t>PRODUCT OUTCOME  ·  NORTH STAR</a:t>
+              <a:t>NORTH STAR METRIC</a:t>
             </a:r>
             <a:endParaRPr lang="en-US" sz="1400" dirty="0"/>
           </a:p>
@@ -9033,7 +9027,7 @@
         </p:nvSpPr>
         <p:spPr>
           <a:xfrm>
-            <a:off x="4160520" y="1536192"/>
+            <a:off x="4160520" y="1609344"/>
             <a:ext cx="2834640" cy="502920"/>
           </a:xfrm>
           <a:prstGeom prst="rect">
@@ -9076,11 +9070,11 @@
         <p:spPr>
           <a:xfrm>
             <a:off x="7452360" y="1188720"/>
-            <a:ext cx="4270248" cy="914400"/>
+            <a:ext cx="4270248" cy="987552"/>
           </a:xfrm>
           <a:prstGeom prst="roundRect">
             <a:avLst>
-              <a:gd name="adj" fmla="val 8000"/>
+              <a:gd name="adj" fmla="val 7407"/>
             </a:avLst>
           </a:prstGeom>
           <a:solidFill>
@@ -9103,7 +9097,7 @@
         <p:spPr>
           <a:xfrm>
             <a:off x="7662672" y="1280160"/>
-            <a:ext cx="3886200" cy="256032"/>
+            <a:ext cx="3886200" cy="274320"/>
           </a:xfrm>
           <a:prstGeom prst="rect">
             <a:avLst/>
@@ -9127,7 +9121,7 @@
                 <a:ea typeface="Calibri" pitchFamily="34" charset="-122"/>
                 <a:cs typeface="Calibri" pitchFamily="34" charset="-120"/>
               </a:rPr>
-              <a:t>THE DEFINITION THAT DECIDES EVERYTHING</a:t>
+              <a:t>THE DEFINITION THAT DECIDES IT</a:t>
             </a:r>
             <a:endParaRPr lang="en-US" sz="1400" dirty="0"/>
           </a:p>
@@ -9141,7 +9135,7 @@
         </p:nvSpPr>
         <p:spPr>
           <a:xfrm>
-            <a:off x="7662672" y="1536192"/>
+            <a:off x="7662672" y="1609344"/>
             <a:ext cx="3886200" cy="502920"/>
           </a:xfrm>
           <a:prstGeom prst="rect">
@@ -9888,17 +9882,17 @@
         </p:nvSpPr>
         <p:spPr>
           <a:xfrm>
-            <a:off x="713232" y="4754880"/>
-            <a:ext cx="5120640" cy="1051560"/>
-          </a:xfrm>
-          <a:prstGeom prst="rect">
-            <a:avLst/>
-          </a:prstGeom>
-          <a:noFill/>
-          <a:ln/>
-        </p:spPr>
-        <p:txBody>
-          <a:bodyPr wrap="square" lIns="0" tIns="0" rIns="0" bIns="0" rtlCol="0" anchor="ctr"/>
+            <a:off x="713232" y="4846320"/>
+            <a:ext cx="5120640" cy="1024128"/>
+          </a:xfrm>
+          <a:prstGeom prst="rect">
+            <a:avLst/>
+          </a:prstGeom>
+          <a:noFill/>
+          <a:ln/>
+        </p:spPr>
+        <p:txBody>
+          <a:bodyPr wrap="square" lIns="0" tIns="0" rIns="0" bIns="0" rtlCol="0" anchor="t"/>
           <a:lstStyle/>
           <a:p>
             <a:pPr indent="0" marL="0">
@@ -9916,7 +9910,7 @@
                 <a:ea typeface="Calibri" pitchFamily="34" charset="-122"/>
                 <a:cs typeface="Calibri" pitchFamily="34" charset="-120"/>
               </a:rPr>
-              <a:t>Of the four drivers, three are already healthy: intent arrives in-app (Blinkit 16 vs Amazon 3), sessions are frequent, and the catalogue is there. The one that is not is CONSIDERED — the shopper cannot evaluate fast enough. So the intervention targets evaluation cost, and nothing else.</a:t>
+              <a:t>Three of the four are already healthy: intent arrives in-app (Blinkit 16 vs Amazon 3), sessions are frequent, the catalogue is there. Only CONSIDERED is not — the shopper cannot evaluate fast enough. That is what the intervention targets.</a:t>
             </a:r>
             <a:endParaRPr lang="en-US" sz="1400" dirty="0"/>
           </a:p>
@@ -9996,17 +9990,17 @@
         </p:nvSpPr>
         <p:spPr>
           <a:xfrm>
-            <a:off x="6473952" y="4754880"/>
-            <a:ext cx="5029200" cy="1051560"/>
-          </a:xfrm>
-          <a:prstGeom prst="rect">
-            <a:avLst/>
-          </a:prstGeom>
-          <a:noFill/>
-          <a:ln/>
-        </p:spPr>
-        <p:txBody>
-          <a:bodyPr wrap="square" lIns="0" tIns="0" rIns="0" bIns="0" rtlCol="0" anchor="ctr"/>
+            <a:off x="6473952" y="4846320"/>
+            <a:ext cx="5029200" cy="1024128"/>
+          </a:xfrm>
+          <a:prstGeom prst="rect">
+            <a:avLst/>
+          </a:prstGeom>
+          <a:noFill/>
+          <a:ln/>
+        </p:spPr>
+        <p:txBody>
+          <a:bodyPr wrap="square" lIns="0" tIns="0" rIns="0" bIns="0" rtlCol="0" anchor="t"/>
           <a:lstStyle/>
           <a:p>
             <a:pPr indent="0" marL="0">
@@ -10024,7 +10018,7 @@
                 <a:ea typeface="Calibri" pitchFamily="34" charset="-122"/>
                 <a:cs typeface="Calibri" pitchFamily="34" charset="-120"/>
               </a:rPr>
-              <a:t>The spec first ranked the repeat prompt above first trial, reasoning that a monthly metric rewards repeats. It does not — that repeat sits inside the lookback and scores zero. First crossovers now lead; the repeat prompt serves the secondary metric.</a:t>
+              <a:t>The spec first ranked the repeat prompt above first trial, reasoning that a monthly metric rewards repeats. It does not — that repeat sits inside the lookback and scores zero. First crossovers now lead.</a:t>
             </a:r>
             <a:endParaRPr lang="en-US" sz="1400" dirty="0"/>
           </a:p>
@@ -11172,7 +11166,7 @@
                 <a:ea typeface="Calibri" pitchFamily="34" charset="-122"/>
                 <a:cs typeface="Calibri" pitchFamily="34" charset="-120"/>
               </a:rPr>
-              <a:t>5 NEW CATEGORIES</a:t>
+              <a:t>5 CATEGORIES</a:t>
             </a:r>
             <a:endParaRPr lang="en-US" sz="1400" dirty="0"/>
           </a:p>
@@ -11400,7 +11394,7 @@
         <p:spPr>
           <a:xfrm>
             <a:off x="7772400" y="3931920"/>
-            <a:ext cx="1234440" cy="274320"/>
+            <a:ext cx="1463040" cy="274320"/>
           </a:xfrm>
           <a:prstGeom prst="rect">
             <a:avLst/>
@@ -11438,8 +11432,8 @@
         </p:nvSpPr>
         <p:spPr>
           <a:xfrm>
-            <a:off x="9006840" y="3931920"/>
-            <a:ext cx="2487168" cy="457200"/>
+            <a:off x="9253728" y="3931920"/>
+            <a:ext cx="2240280" cy="457200"/>
           </a:xfrm>
           <a:prstGeom prst="rect">
             <a:avLst/>
@@ -11480,8 +11474,8 @@
         </p:nvSpPr>
         <p:spPr>
           <a:xfrm>
-            <a:off x="7772400" y="4462272"/>
-            <a:ext cx="1234440" cy="274320"/>
+            <a:off x="7772400" y="4425696"/>
+            <a:ext cx="1463040" cy="274320"/>
           </a:xfrm>
           <a:prstGeom prst="rect">
             <a:avLst/>
@@ -11519,8 +11513,8 @@
         </p:nvSpPr>
         <p:spPr>
           <a:xfrm>
-            <a:off x="9006840" y="4462272"/>
-            <a:ext cx="2487168" cy="457200"/>
+            <a:off x="9253728" y="4425696"/>
+            <a:ext cx="2240280" cy="457200"/>
           </a:xfrm>
           <a:prstGeom prst="rect">
             <a:avLst/>
@@ -11561,8 +11555,8 @@
         </p:nvSpPr>
         <p:spPr>
           <a:xfrm>
-            <a:off x="7772400" y="4992624"/>
-            <a:ext cx="1234440" cy="274320"/>
+            <a:off x="7772400" y="4919472"/>
+            <a:ext cx="1463040" cy="274320"/>
           </a:xfrm>
           <a:prstGeom prst="rect">
             <a:avLst/>
@@ -11600,8 +11594,8 @@
         </p:nvSpPr>
         <p:spPr>
           <a:xfrm>
-            <a:off x="9006840" y="4992624"/>
-            <a:ext cx="2487168" cy="457200"/>
+            <a:off x="9253728" y="4919472"/>
+            <a:ext cx="2240280" cy="457200"/>
           </a:xfrm>
           <a:prstGeom prst="rect">
             <a:avLst/>
@@ -11642,7 +11636,7 @@
         </p:nvSpPr>
         <p:spPr>
           <a:xfrm>
-            <a:off x="7772400" y="5413248"/>
+            <a:off x="7772400" y="5468112"/>
             <a:ext cx="3721608" cy="384048"/>
           </a:xfrm>
           <a:prstGeom prst="roundRect">
@@ -11664,7 +11658,7 @@
         </p:nvSpPr>
         <p:spPr>
           <a:xfrm>
-            <a:off x="7772400" y="5413248"/>
+            <a:off x="7772400" y="5468112"/>
             <a:ext cx="3721608" cy="384048"/>
           </a:xfrm>
           <a:prstGeom prst="rect">
@@ -12784,7 +12778,7 @@
                 <a:ea typeface="Calibri" pitchFamily="34" charset="-122"/>
                 <a:cs typeface="Calibri" pitchFamily="34" charset="-120"/>
               </a:rPr>
-              <a:t>Agent evals — 11 pass, 1 reports NOT RUN</a:t>
+              <a:t>Agent evals — 11 pass, 1 not run</a:t>
             </a:r>
             <a:endParaRPr lang="en-US" sz="1400" dirty="0"/>
           </a:p>
@@ -12911,7 +12905,7 @@
                 <a:ea typeface="Calibri" pitchFamily="34" charset="-122"/>
                 <a:cs typeface="Calibri" pitchFamily="34" charset="-120"/>
               </a:rPr>
-              <a:t>Each check mutation-tested — a check that cannot fail is not evidence</a:t>
+              <a:t>Each check is mutation-tested</a:t>
             </a:r>
             <a:endParaRPr lang="en-US" sz="1400" dirty="0"/>
           </a:p>
@@ -12959,7 +12953,7 @@
                   </a:extLst>
                 </a:hlinkClick>
               </a:rPr>
-              <a:t>Deployed via GitHub Actions to GitHub Pages. The deploy job runs the eval suite first and refuses to publish if any check fails.</a:t>
+              <a:t>Deployed via GitHub Actions to GitHub Pages. The deploy job runs the evals first and refuses to publish on failure.</a:t>
             </a:r>
             <a:endParaRPr lang="en-US" sz="1400" dirty="0"/>
           </a:p>

--- a/deck/Blinkit-Category-Exploration.pptx
+++ b/deck/Blinkit-Category-Exploration.pptx
@@ -5533,7 +5533,7 @@
                 <a:ea typeface="Cambria" pitchFamily="34" charset="-122"/>
                 <a:cs typeface="Cambria" pitchFamily="34" charset="-120"/>
               </a:rPr>
-              <a:t>Trying to break our own insights: 3 pass, 2 report NOT RUN</a:t>
+              <a:t>Trying to break our own insights: 4 pass, 2 report NOT RUN</a:t>
             </a:r>
             <a:endParaRPr lang="en-US" sz="2300" dirty="0"/>
           </a:p>
@@ -5547,12 +5547,12 @@
         </p:nvSpPr>
         <p:spPr>
           <a:xfrm>
-            <a:off x="502920" y="1188720"/>
-            <a:ext cx="7360920" cy="896112"/>
+            <a:off x="502920" y="1152144"/>
+            <a:ext cx="7360920" cy="841248"/>
           </a:xfrm>
           <a:prstGeom prst="roundRect">
             <a:avLst>
-              <a:gd name="adj" fmla="val 8163"/>
+              <a:gd name="adj" fmla="val 8696"/>
             </a:avLst>
           </a:prstGeom>
           <a:solidFill>
@@ -5574,17 +5574,17 @@
         </p:nvSpPr>
         <p:spPr>
           <a:xfrm>
-            <a:off x="685800" y="1280160"/>
-            <a:ext cx="2377440" cy="292608"/>
-          </a:xfrm>
-          <a:prstGeom prst="rect">
-            <a:avLst/>
-          </a:prstGeom>
-          <a:noFill/>
-          <a:ln/>
-        </p:spPr>
-        <p:txBody>
-          <a:bodyPr wrap="square" lIns="0" tIns="0" rIns="0" bIns="0" rtlCol="0" anchor="ctr"/>
+            <a:off x="685800" y="1225296"/>
+            <a:ext cx="2377440" cy="457200"/>
+          </a:xfrm>
+          <a:prstGeom prst="rect">
+            <a:avLst/>
+          </a:prstGeom>
+          <a:noFill/>
+          <a:ln/>
+        </p:spPr>
+        <p:txBody>
+          <a:bodyPr wrap="square" lIns="0" tIns="0" rIns="0" bIns="0" rtlCol="0" anchor="t"/>
           <a:lstStyle/>
           <a:p>
             <a:pPr indent="0" marL="0">
@@ -5613,7 +5613,7 @@
         </p:nvSpPr>
         <p:spPr>
           <a:xfrm>
-            <a:off x="3154680" y="1289304"/>
+            <a:off x="3154680" y="1234440"/>
             <a:ext cx="1143000" cy="274320"/>
           </a:xfrm>
           <a:prstGeom prst="roundRect">
@@ -5635,7 +5635,7 @@
         </p:nvSpPr>
         <p:spPr>
           <a:xfrm>
-            <a:off x="3154680" y="1289304"/>
+            <a:off x="3154680" y="1234440"/>
             <a:ext cx="1143000" cy="274320"/>
           </a:xfrm>
           <a:prstGeom prst="rect">
@@ -5674,17 +5674,17 @@
         </p:nvSpPr>
         <p:spPr>
           <a:xfrm>
-            <a:off x="4434840" y="1261872"/>
-            <a:ext cx="3291840" cy="749808"/>
-          </a:xfrm>
-          <a:prstGeom prst="rect">
-            <a:avLst/>
-          </a:prstGeom>
-          <a:noFill/>
-          <a:ln/>
-        </p:spPr>
-        <p:txBody>
-          <a:bodyPr wrap="square" lIns="0" tIns="0" rIns="0" bIns="0" rtlCol="0" anchor="ctr"/>
+            <a:off x="4434840" y="1216152"/>
+            <a:ext cx="3291840" cy="676656"/>
+          </a:xfrm>
+          <a:prstGeom prst="rect">
+            <a:avLst/>
+          </a:prstGeom>
+          <a:noFill/>
+          <a:ln/>
+        </p:spPr>
+        <p:txBody>
+          <a:bodyPr wrap="square" lIns="0" tIns="0" rIns="0" bIns="0" rtlCol="0" anchor="t"/>
           <a:lstStyle/>
           <a:p>
             <a:pPr indent="0" marL="0">
@@ -5702,7 +5702,7 @@
                 <a:ea typeface="Calibri" pitchFamily="34" charset="-122"/>
                 <a:cs typeface="Calibri" pitchFamily="34" charset="-120"/>
               </a:rPr>
-              <a:t>125 quotes checked against source text. 4 fabrications in 924 extractions; the rest are filtered before display.</a:t>
+              <a:t>924 quotes checked against source text; 4 fabricated (0.43%). Of the 125 reaching a theme, 0 unverifiable.</a:t>
             </a:r>
             <a:endParaRPr lang="en-US" sz="1400" dirty="0"/>
           </a:p>
@@ -5716,12 +5716,12 @@
         </p:nvSpPr>
         <p:spPr>
           <a:xfrm>
-            <a:off x="502920" y="2176272"/>
-            <a:ext cx="7360920" cy="896112"/>
+            <a:off x="502920" y="2020824"/>
+            <a:ext cx="7360920" cy="841248"/>
           </a:xfrm>
           <a:prstGeom prst="roundRect">
             <a:avLst>
-              <a:gd name="adj" fmla="val 8163"/>
+              <a:gd name="adj" fmla="val 8696"/>
             </a:avLst>
           </a:prstGeom>
           <a:solidFill>
@@ -5743,17 +5743,17 @@
         </p:nvSpPr>
         <p:spPr>
           <a:xfrm>
-            <a:off x="685800" y="2267712"/>
-            <a:ext cx="2377440" cy="292608"/>
-          </a:xfrm>
-          <a:prstGeom prst="rect">
-            <a:avLst/>
-          </a:prstGeom>
-          <a:noFill/>
-          <a:ln/>
-        </p:spPr>
-        <p:txBody>
-          <a:bodyPr wrap="square" lIns="0" tIns="0" rIns="0" bIns="0" rtlCol="0" anchor="ctr"/>
+            <a:off x="685800" y="2093976"/>
+            <a:ext cx="2377440" cy="457200"/>
+          </a:xfrm>
+          <a:prstGeom prst="rect">
+            <a:avLst/>
+          </a:prstGeom>
+          <a:noFill/>
+          <a:ln/>
+        </p:spPr>
+        <p:txBody>
+          <a:bodyPr wrap="square" lIns="0" tIns="0" rIns="0" bIns="0" rtlCol="0" anchor="t"/>
           <a:lstStyle/>
           <a:p>
             <a:pPr indent="0" marL="0">
@@ -5768,7 +5768,7 @@
                 <a:ea typeface="Calibri" pitchFamily="34" charset="-122"/>
                 <a:cs typeface="Calibri" pitchFamily="34" charset="-120"/>
               </a:rPr>
-              <a:t>Hold-out generalisation</a:t>
+              <a:t>Theme saturation</a:t>
             </a:r>
             <a:endParaRPr lang="en-US" sz="1400" dirty="0"/>
           </a:p>
@@ -5782,7 +5782,7 @@
         </p:nvSpPr>
         <p:spPr>
           <a:xfrm>
-            <a:off x="3154680" y="2276856"/>
+            <a:off x="3154680" y="2103120"/>
             <a:ext cx="1143000" cy="274320"/>
           </a:xfrm>
           <a:prstGeom prst="roundRect">
@@ -5804,7 +5804,7 @@
         </p:nvSpPr>
         <p:spPr>
           <a:xfrm>
-            <a:off x="3154680" y="2276856"/>
+            <a:off x="3154680" y="2103120"/>
             <a:ext cx="1143000" cy="274320"/>
           </a:xfrm>
           <a:prstGeom prst="rect">
@@ -5843,17 +5843,17 @@
         </p:nvSpPr>
         <p:spPr>
           <a:xfrm>
-            <a:off x="4434840" y="2249424"/>
-            <a:ext cx="3291840" cy="749808"/>
-          </a:xfrm>
-          <a:prstGeom prst="rect">
-            <a:avLst/>
-          </a:prstGeom>
-          <a:noFill/>
-          <a:ln/>
-        </p:spPr>
-        <p:txBody>
-          <a:bodyPr wrap="square" lIns="0" tIns="0" rIns="0" bIns="0" rtlCol="0" anchor="ctr"/>
+            <a:off x="4434840" y="2084832"/>
+            <a:ext cx="3291840" cy="676656"/>
+          </a:xfrm>
+          <a:prstGeom prst="rect">
+            <a:avLst/>
+          </a:prstGeom>
+          <a:noFill/>
+          <a:ln/>
+        </p:spPr>
+        <p:txBody>
+          <a:bodyPr wrap="square" lIns="0" tIns="0" rIns="0" bIns="0" rtlCol="0" anchor="t"/>
           <a:lstStyle/>
           <a:p>
             <a:pPr indent="0" marL="0">
@@ -5871,7 +5871,7 @@
                 <a:ea typeface="Calibri" pitchFamily="34" charset="-122"/>
                 <a:cs typeface="Calibri" pitchFamily="34" charset="-120"/>
               </a:rPr>
-              <a:t>Out-of-sample, against a size-matched permutation null. Real themes z = +17.4; word salad z = −2.6.</a:t>
+              <a:t>95.3% of the 15 distinct labels were found by the halfway point; 0.003 new per document after that.</a:t>
             </a:r>
             <a:endParaRPr lang="en-US" sz="1400" dirty="0"/>
           </a:p>
@@ -5885,12 +5885,12 @@
         </p:nvSpPr>
         <p:spPr>
           <a:xfrm>
-            <a:off x="502920" y="3163824"/>
-            <a:ext cx="7360920" cy="896112"/>
+            <a:off x="502920" y="2889504"/>
+            <a:ext cx="7360920" cy="841248"/>
           </a:xfrm>
           <a:prstGeom prst="roundRect">
             <a:avLst>
-              <a:gd name="adj" fmla="val 8163"/>
+              <a:gd name="adj" fmla="val 8696"/>
             </a:avLst>
           </a:prstGeom>
           <a:solidFill>
@@ -5912,17 +5912,17 @@
         </p:nvSpPr>
         <p:spPr>
           <a:xfrm>
-            <a:off x="685800" y="3255264"/>
-            <a:ext cx="2377440" cy="292608"/>
-          </a:xfrm>
-          <a:prstGeom prst="rect">
-            <a:avLst/>
-          </a:prstGeom>
-          <a:noFill/>
-          <a:ln/>
-        </p:spPr>
-        <p:txBody>
-          <a:bodyPr wrap="square" lIns="0" tIns="0" rIns="0" bIns="0" rtlCol="0" anchor="ctr"/>
+            <a:off x="685800" y="2962656"/>
+            <a:ext cx="2377440" cy="457200"/>
+          </a:xfrm>
+          <a:prstGeom prst="rect">
+            <a:avLst/>
+          </a:prstGeom>
+          <a:noFill/>
+          <a:ln/>
+        </p:spPr>
+        <p:txBody>
+          <a:bodyPr wrap="square" lIns="0" tIns="0" rIns="0" bIns="0" rtlCol="0" anchor="t"/>
           <a:lstStyle/>
           <a:p>
             <a:pPr indent="0" marL="0">
@@ -5937,7 +5937,7 @@
                 <a:ea typeface="Calibri" pitchFamily="34" charset="-122"/>
                 <a:cs typeface="Calibri" pitchFamily="34" charset="-120"/>
               </a:rPr>
-              <a:t>Theme non-degeneracy</a:t>
+              <a:t>Hold-out generalisation</a:t>
             </a:r>
             <a:endParaRPr lang="en-US" sz="1400" dirty="0"/>
           </a:p>
@@ -5951,7 +5951,7 @@
         </p:nvSpPr>
         <p:spPr>
           <a:xfrm>
-            <a:off x="3154680" y="3264408"/>
+            <a:off x="3154680" y="2971800"/>
             <a:ext cx="1143000" cy="274320"/>
           </a:xfrm>
           <a:prstGeom prst="roundRect">
@@ -5973,7 +5973,7 @@
         </p:nvSpPr>
         <p:spPr>
           <a:xfrm>
-            <a:off x="3154680" y="3264408"/>
+            <a:off x="3154680" y="2971800"/>
             <a:ext cx="1143000" cy="274320"/>
           </a:xfrm>
           <a:prstGeom prst="rect">
@@ -6012,17 +6012,17 @@
         </p:nvSpPr>
         <p:spPr>
           <a:xfrm>
-            <a:off x="4434840" y="3236976"/>
-            <a:ext cx="3291840" cy="749808"/>
-          </a:xfrm>
-          <a:prstGeom prst="rect">
-            <a:avLst/>
-          </a:prstGeom>
-          <a:noFill/>
-          <a:ln/>
-        </p:spPr>
-        <p:txBody>
-          <a:bodyPr wrap="square" lIns="0" tIns="0" rIns="0" bIns="0" rtlCol="0" anchor="ctr"/>
+            <a:off x="4434840" y="2953512"/>
+            <a:ext cx="3291840" cy="676656"/>
+          </a:xfrm>
+          <a:prstGeom prst="rect">
+            <a:avLst/>
+          </a:prstGeom>
+          <a:noFill/>
+          <a:ln/>
+        </p:spPr>
+        <p:txBody>
+          <a:bodyPr wrap="square" lIns="0" tIns="0" rIns="0" bIns="0" rtlCol="0" anchor="t"/>
           <a:lstStyle/>
           <a:p>
             <a:pPr indent="0" marL="0">
@@ -6040,7 +6040,7 @@
                 <a:ea typeface="Calibri" pitchFamily="34" charset="-122"/>
                 <a:cs typeface="Calibri" pitchFamily="34" charset="-120"/>
               </a:rPr>
-              <a:t>An earlier run collapsed to one theme at 100% prevalence and reported success. Now asserted in code.</a:t>
+              <a:t>Re-fit on 505, tested on 126 unseen. Fit 0.460 vs 0.462 on training, against a permutation null: z = 11.42.</a:t>
             </a:r>
             <a:endParaRPr lang="en-US" sz="1400" dirty="0"/>
           </a:p>
@@ -6054,12 +6054,12 @@
         </p:nvSpPr>
         <p:spPr>
           <a:xfrm>
-            <a:off x="502920" y="4151376"/>
-            <a:ext cx="7360920" cy="896112"/>
+            <a:off x="502920" y="3758184"/>
+            <a:ext cx="7360920" cy="841248"/>
           </a:xfrm>
           <a:prstGeom prst="roundRect">
             <a:avLst>
-              <a:gd name="adj" fmla="val 8163"/>
+              <a:gd name="adj" fmla="val 8696"/>
             </a:avLst>
           </a:prstGeom>
           <a:solidFill>
@@ -6081,17 +6081,17 @@
         </p:nvSpPr>
         <p:spPr>
           <a:xfrm>
-            <a:off x="685800" y="4242816"/>
-            <a:ext cx="2377440" cy="292608"/>
-          </a:xfrm>
-          <a:prstGeom prst="rect">
-            <a:avLst/>
-          </a:prstGeom>
-          <a:noFill/>
-          <a:ln/>
-        </p:spPr>
-        <p:txBody>
-          <a:bodyPr wrap="square" lIns="0" tIns="0" rIns="0" bIns="0" rtlCol="0" anchor="ctr"/>
+            <a:off x="685800" y="3831336"/>
+            <a:ext cx="2377440" cy="457200"/>
+          </a:xfrm>
+          <a:prstGeom prst="rect">
+            <a:avLst/>
+          </a:prstGeom>
+          <a:noFill/>
+          <a:ln/>
+        </p:spPr>
+        <p:txBody>
+          <a:bodyPr wrap="square" lIns="0" tIns="0" rIns="0" bIns="0" rtlCol="0" anchor="t"/>
           <a:lstStyle/>
           <a:p>
             <a:pPr indent="0" marL="0">
@@ -6106,7 +6106,7 @@
                 <a:ea typeface="Calibri" pitchFamily="34" charset="-122"/>
                 <a:cs typeface="Calibri" pitchFamily="34" charset="-120"/>
               </a:rPr>
-              <a:t>Source spread</a:t>
+              <a:t>Relevance gate audit</a:t>
             </a:r>
             <a:endParaRPr lang="en-US" sz="1400" dirty="0"/>
           </a:p>
@@ -6120,7 +6120,7 @@
         </p:nvSpPr>
         <p:spPr>
           <a:xfrm>
-            <a:off x="3154680" y="4251960"/>
+            <a:off x="3154680" y="3840480"/>
             <a:ext cx="1143000" cy="274320"/>
           </a:xfrm>
           <a:prstGeom prst="roundRect">
@@ -6129,7 +6129,7 @@
             </a:avLst>
           </a:prstGeom>
           <a:solidFill>
-            <a:srgbClr val="C4552B"/>
+            <a:srgbClr val="1D6FB8"/>
           </a:solidFill>
           <a:ln/>
         </p:spPr>
@@ -6142,7 +6142,7 @@
         </p:nvSpPr>
         <p:spPr>
           <a:xfrm>
-            <a:off x="3154680" y="4251960"/>
+            <a:off x="3154680" y="3840480"/>
             <a:ext cx="1143000" cy="274320"/>
           </a:xfrm>
           <a:prstGeom prst="rect">
@@ -6167,7 +6167,7 @@
                 <a:ea typeface="Calibri" pitchFamily="34" charset="-122"/>
                 <a:cs typeface="Calibri" pitchFamily="34" charset="-120"/>
               </a:rPr>
-              <a:t>NOT RUN</a:t>
+              <a:t>PASS</a:t>
             </a:r>
             <a:endParaRPr lang="en-US" sz="1400" dirty="0"/>
           </a:p>
@@ -6181,17 +6181,17 @@
         </p:nvSpPr>
         <p:spPr>
           <a:xfrm>
-            <a:off x="4434840" y="4224528"/>
-            <a:ext cx="3291840" cy="749808"/>
-          </a:xfrm>
-          <a:prstGeom prst="rect">
-            <a:avLst/>
-          </a:prstGeom>
-          <a:noFill/>
-          <a:ln/>
-        </p:spPr>
-        <p:txBody>
-          <a:bodyPr wrap="square" lIns="0" tIns="0" rIns="0" bIns="0" rtlCol="0" anchor="ctr"/>
+            <a:off x="4434840" y="3822192"/>
+            <a:ext cx="3291840" cy="676656"/>
+          </a:xfrm>
+          <a:prstGeom prst="rect">
+            <a:avLst/>
+          </a:prstGeom>
+          <a:noFill/>
+          <a:ln/>
+        </p:spPr>
+        <p:txBody>
+          <a:bodyPr wrap="square" lIns="0" tIns="0" rIns="0" bIns="0" rtlCol="0" anchor="t"/>
           <a:lstStyle/>
           <a:p>
             <a:pPr indent="0" marL="0">
@@ -6209,7 +6209,7 @@
                 <a:ea typeface="Calibri" pitchFamily="34" charset="-122"/>
                 <a:cs typeface="Calibri" pitchFamily="34" charset="-120"/>
               </a:rPr>
-              <a:t>95% of the corpus is one source, so the check cannot discriminate. Reports the chance figure instead.</a:t>
+              <a:t>40 of 2,402 rejected documents re-read. 0 false negatives — enough to bound a large error rate, not a small one.</a:t>
             </a:r>
             <a:endParaRPr lang="en-US" sz="1400" dirty="0"/>
           </a:p>
@@ -6223,12 +6223,12 @@
         </p:nvSpPr>
         <p:spPr>
           <a:xfrm>
-            <a:off x="502920" y="5138928"/>
-            <a:ext cx="7360920" cy="896112"/>
+            <a:off x="502920" y="4626864"/>
+            <a:ext cx="7360920" cy="841248"/>
           </a:xfrm>
           <a:prstGeom prst="roundRect">
             <a:avLst>
-              <a:gd name="adj" fmla="val 8163"/>
+              <a:gd name="adj" fmla="val 8696"/>
             </a:avLst>
           </a:prstGeom>
           <a:solidFill>
@@ -6250,17 +6250,17 @@
         </p:nvSpPr>
         <p:spPr>
           <a:xfrm>
-            <a:off x="685800" y="5230368"/>
-            <a:ext cx="2377440" cy="292608"/>
-          </a:xfrm>
-          <a:prstGeom prst="rect">
-            <a:avLst/>
-          </a:prstGeom>
-          <a:noFill/>
-          <a:ln/>
-        </p:spPr>
-        <p:txBody>
-          <a:bodyPr wrap="square" lIns="0" tIns="0" rIns="0" bIns="0" rtlCol="0" anchor="ctr"/>
+            <a:off x="685800" y="4700016"/>
+            <a:ext cx="2377440" cy="457200"/>
+          </a:xfrm>
+          <a:prstGeom prst="rect">
+            <a:avLst/>
+          </a:prstGeom>
+          <a:noFill/>
+          <a:ln/>
+        </p:spPr>
+        <p:txBody>
+          <a:bodyPr wrap="square" lIns="0" tIns="0" rIns="0" bIns="0" rtlCol="0" anchor="t"/>
           <a:lstStyle/>
           <a:p>
             <a:pPr indent="0" marL="0">
@@ -6275,7 +6275,7 @@
                 <a:ea typeface="Calibri" pitchFamily="34" charset="-122"/>
                 <a:cs typeface="Calibri" pitchFamily="34" charset="-120"/>
               </a:rPr>
-              <a:t>Inter-rater agreement</a:t>
+              <a:t>Source spread</a:t>
             </a:r>
             <a:endParaRPr lang="en-US" sz="1400" dirty="0"/>
           </a:p>
@@ -6289,7 +6289,7 @@
         </p:nvSpPr>
         <p:spPr>
           <a:xfrm>
-            <a:off x="3154680" y="5239512"/>
+            <a:off x="3154680" y="4709160"/>
             <a:ext cx="1143000" cy="274320"/>
           </a:xfrm>
           <a:prstGeom prst="roundRect">
@@ -6311,7 +6311,7 @@
         </p:nvSpPr>
         <p:spPr>
           <a:xfrm>
-            <a:off x="3154680" y="5239512"/>
+            <a:off x="3154680" y="4709160"/>
             <a:ext cx="1143000" cy="274320"/>
           </a:xfrm>
           <a:prstGeom prst="rect">
@@ -6350,17 +6350,17 @@
         </p:nvSpPr>
         <p:spPr>
           <a:xfrm>
-            <a:off x="4434840" y="5212080"/>
-            <a:ext cx="3291840" cy="749808"/>
-          </a:xfrm>
-          <a:prstGeom prst="rect">
-            <a:avLst/>
-          </a:prstGeom>
-          <a:noFill/>
-          <a:ln/>
-        </p:spPr>
-        <p:txBody>
-          <a:bodyPr wrap="square" lIns="0" tIns="0" rIns="0" bIns="0" rtlCol="0" anchor="ctr"/>
+            <a:off x="4434840" y="4690872"/>
+            <a:ext cx="3291840" cy="676656"/>
+          </a:xfrm>
+          <a:prstGeom prst="rect">
+            <a:avLst/>
+          </a:prstGeom>
+          <a:noFill/>
+          <a:ln/>
+        </p:spPr>
+        <p:txBody>
+          <a:bodyPr wrap="square" lIns="0" tIns="0" rIns="0" bIns="0" rtlCol="0" anchor="t"/>
           <a:lstStyle/>
           <a:p>
             <a:pPr indent="0" marL="0">
@@ -6378,6 +6378,175 @@
                 <a:ea typeface="Calibri" pitchFamily="34" charset="-122"/>
                 <a:cs typeface="Calibri" pitchFamily="34" charset="-120"/>
               </a:rPr>
+              <a:t>95.1% of the corpus is one source. 11 of 25 themes are single-source; 8.6 would be by chance.</a:t>
+            </a:r>
+            <a:endParaRPr lang="en-US" sz="1400" dirty="0"/>
+          </a:p>
+        </p:txBody>
+      </p:sp>
+      <p:sp>
+        <p:nvSpPr>
+          <p:cNvPr id="30" name="Shape 28"/>
+          <p:cNvSpPr/>
+          <p:nvPr/>
+        </p:nvSpPr>
+        <p:spPr>
+          <a:xfrm>
+            <a:off x="502920" y="5495544"/>
+            <a:ext cx="7360920" cy="841248"/>
+          </a:xfrm>
+          <a:prstGeom prst="roundRect">
+            <a:avLst>
+              <a:gd name="adj" fmla="val 8696"/>
+            </a:avLst>
+          </a:prstGeom>
+          <a:solidFill>
+            <a:srgbClr val="FFFFFF"/>
+          </a:solidFill>
+          <a:ln w="12700">
+            <a:solidFill>
+              <a:srgbClr val="D8DEE7"/>
+            </a:solidFill>
+            <a:prstDash val="solid"/>
+          </a:ln>
+        </p:spPr>
+      </p:sp>
+      <p:sp>
+        <p:nvSpPr>
+          <p:cNvPr id="31" name="Text 29"/>
+          <p:cNvSpPr/>
+          <p:nvPr/>
+        </p:nvSpPr>
+        <p:spPr>
+          <a:xfrm>
+            <a:off x="685800" y="5568696"/>
+            <a:ext cx="2377440" cy="457200"/>
+          </a:xfrm>
+          <a:prstGeom prst="rect">
+            <a:avLst/>
+          </a:prstGeom>
+          <a:noFill/>
+          <a:ln/>
+        </p:spPr>
+        <p:txBody>
+          <a:bodyPr wrap="square" lIns="0" tIns="0" rIns="0" bIns="0" rtlCol="0" anchor="t"/>
+          <a:lstStyle/>
+          <a:p>
+            <a:pPr indent="0" marL="0">
+              <a:buNone/>
+            </a:pPr>
+            <a:r>
+              <a:rPr lang="en-US" sz="1400" b="1" dirty="0">
+                <a:solidFill>
+                  <a:srgbClr val="1A1D29"/>
+                </a:solidFill>
+                <a:latin typeface="Calibri" pitchFamily="34" charset="0"/>
+                <a:ea typeface="Calibri" pitchFamily="34" charset="-122"/>
+                <a:cs typeface="Calibri" pitchFamily="34" charset="-120"/>
+              </a:rPr>
+              <a:t>Human agreement (Cohen’s κ)</a:t>
+            </a:r>
+            <a:endParaRPr lang="en-US" sz="1400" dirty="0"/>
+          </a:p>
+        </p:txBody>
+      </p:sp>
+      <p:sp>
+        <p:nvSpPr>
+          <p:cNvPr id="32" name="Shape 30"/>
+          <p:cNvSpPr/>
+          <p:nvPr/>
+        </p:nvSpPr>
+        <p:spPr>
+          <a:xfrm>
+            <a:off x="3154680" y="5577840"/>
+            <a:ext cx="1143000" cy="274320"/>
+          </a:xfrm>
+          <a:prstGeom prst="roundRect">
+            <a:avLst>
+              <a:gd name="adj" fmla="val 20000"/>
+            </a:avLst>
+          </a:prstGeom>
+          <a:solidFill>
+            <a:srgbClr val="C4552B"/>
+          </a:solidFill>
+          <a:ln/>
+        </p:spPr>
+      </p:sp>
+      <p:sp>
+        <p:nvSpPr>
+          <p:cNvPr id="33" name="Text 31"/>
+          <p:cNvSpPr/>
+          <p:nvPr/>
+        </p:nvSpPr>
+        <p:spPr>
+          <a:xfrm>
+            <a:off x="3154680" y="5577840"/>
+            <a:ext cx="1143000" cy="274320"/>
+          </a:xfrm>
+          <a:prstGeom prst="rect">
+            <a:avLst/>
+          </a:prstGeom>
+          <a:noFill/>
+          <a:ln/>
+        </p:spPr>
+        <p:txBody>
+          <a:bodyPr wrap="square" lIns="0" tIns="0" rIns="0" bIns="0" rtlCol="0" anchor="ctr"/>
+          <a:lstStyle/>
+          <a:p>
+            <a:pPr algn="ctr" indent="0" marL="0">
+              <a:buNone/>
+            </a:pPr>
+            <a:r>
+              <a:rPr lang="en-US" sz="1400" b="1" dirty="0">
+                <a:solidFill>
+                  <a:srgbClr val="FFFFFF"/>
+                </a:solidFill>
+                <a:latin typeface="Calibri" pitchFamily="34" charset="0"/>
+                <a:ea typeface="Calibri" pitchFamily="34" charset="-122"/>
+                <a:cs typeface="Calibri" pitchFamily="34" charset="-120"/>
+              </a:rPr>
+              <a:t>NOT RUN</a:t>
+            </a:r>
+            <a:endParaRPr lang="en-US" sz="1400" dirty="0"/>
+          </a:p>
+        </p:txBody>
+      </p:sp>
+      <p:sp>
+        <p:nvSpPr>
+          <p:cNvPr id="34" name="Text 32"/>
+          <p:cNvSpPr/>
+          <p:nvPr/>
+        </p:nvSpPr>
+        <p:spPr>
+          <a:xfrm>
+            <a:off x="4434840" y="5559552"/>
+            <a:ext cx="3291840" cy="676656"/>
+          </a:xfrm>
+          <a:prstGeom prst="rect">
+            <a:avLst/>
+          </a:prstGeom>
+          <a:noFill/>
+          <a:ln/>
+        </p:spPr>
+        <p:txBody>
+          <a:bodyPr wrap="square" lIns="0" tIns="0" rIns="0" bIns="0" rtlCol="0" anchor="t"/>
+          <a:lstStyle/>
+          <a:p>
+            <a:pPr indent="0" marL="0">
+              <a:lnSpc>
+                <a:spcPts val="1500"/>
+              </a:lnSpc>
+              <a:buNone/>
+            </a:pPr>
+            <a:r>
+              <a:rPr lang="en-US" sz="1400" dirty="0">
+                <a:solidFill>
+                  <a:srgbClr val="5A6270"/>
+                </a:solidFill>
+                <a:latin typeface="Calibri" pitchFamily="34" charset="0"/>
+                <a:ea typeface="Calibri" pitchFamily="34" charset="-122"/>
+                <a:cs typeface="Calibri" pitchFamily="34" charset="-120"/>
+              </a:rPr>
               <a:t>Needs a hand-labelled gold set that does not exist. Reported absent, not approximated.</a:t>
             </a:r>
             <a:endParaRPr lang="en-US" sz="1400" dirty="0"/>
@@ -6386,7 +6555,7 @@
       </p:sp>
       <p:sp>
         <p:nvSpPr>
-          <p:cNvPr id="30" name="Shape 28"/>
+          <p:cNvPr id="35" name="Shape 33"/>
           <p:cNvSpPr/>
           <p:nvPr/>
         </p:nvSpPr>
@@ -6413,7 +6582,7 @@
       </p:sp>
       <p:sp>
         <p:nvSpPr>
-          <p:cNvPr id="31" name="Text 29"/>
+          <p:cNvPr id="36" name="Text 34"/>
           <p:cNvSpPr/>
           <p:nvPr/>
         </p:nvSpPr>
@@ -6452,7 +6621,7 @@
       </p:sp>
       <p:sp>
         <p:nvSpPr>
-          <p:cNvPr id="32" name="Text 30"/>
+          <p:cNvPr id="37" name="Text 35"/>
           <p:cNvSpPr/>
           <p:nvPr/>
         </p:nvSpPr>
@@ -6494,7 +6663,7 @@
       </p:sp>
       <p:sp>
         <p:nvSpPr>
-          <p:cNvPr id="33" name="Text 31"/>
+          <p:cNvPr id="38" name="Text 36"/>
           <p:cNvSpPr/>
           <p:nvPr/>
         </p:nvSpPr>
@@ -6533,7 +6702,7 @@
       </p:sp>
       <p:sp>
         <p:nvSpPr>
-          <p:cNvPr id="34" name="Shape 32"/>
+          <p:cNvPr id="39" name="Shape 37"/>
           <p:cNvSpPr/>
           <p:nvPr/>
         </p:nvSpPr>
@@ -6560,7 +6729,7 @@
       </p:sp>
       <p:sp>
         <p:nvSpPr>
-          <p:cNvPr id="35" name="Text 33"/>
+          <p:cNvPr id="40" name="Text 38"/>
           <p:cNvSpPr/>
           <p:nvPr/>
         </p:nvSpPr>
@@ -6599,7 +6768,7 @@
       </p:sp>
       <p:sp>
         <p:nvSpPr>
-          <p:cNvPr id="36" name="Text 34"/>
+          <p:cNvPr id="41" name="Text 39"/>
           <p:cNvSpPr/>
           <p:nvPr/>
         </p:nvSpPr>
@@ -6633,7 +6802,7 @@
                 <a:ea typeface="Calibri" pitchFamily="34" charset="-122"/>
                 <a:cs typeface="Calibri" pitchFamily="34" charset="-120"/>
               </a:rPr>
-              <a:t>Two of these used to print PASS over zero observations. A green line standing for no evidence is worse than an honest gap. Three pass, two abstain, and the deck says which.</a:t>
+              <a:t>Two of these used to print PASS over zero observations. A green line standing for no evidence is worse than an honest gap. Four pass, two abstain, and the deck says which.</a:t>
             </a:r>
             <a:endParaRPr lang="en-US" sz="1400" dirty="0"/>
           </a:p>

--- a/deck/Blinkit-Category-Exploration.pptx
+++ b/deck/Blinkit-Category-Exploration.pptx
@@ -4620,7 +4620,7 @@
                 <a:ea typeface="Calibri" pitchFamily="34" charset="-122"/>
                 <a:cs typeface="Calibri" pitchFamily="34" charset="-120"/>
               </a:rPr>
-              <a:t>documents collected</a:t>
+              <a:t>documents analysed</a:t>
             </a:r>
             <a:endParaRPr lang="en-US" sz="1400" dirty="0"/>
           </a:p>
@@ -4662,7 +4662,7 @@
                 <a:ea typeface="Calibri" pitchFamily="34" charset="-122"/>
                 <a:cs typeface="Calibri" pitchFamily="34" charset="-120"/>
               </a:rPr>
-              <a:t>Play Store 3,033 · App Store 339, across 5 quick-commerce apps</a:t>
+              <a:t>Of 5,898 collected across 11 apps; the rest are not yet gated</a:t>
             </a:r>
             <a:endParaRPr lang="en-US" sz="1400" dirty="0"/>
           </a:p>
@@ -5410,7 +5410,7 @@
                   </a:extLst>
                 </a:hlinkClick>
               </a:rPr>
-              <a:t>Corpus is app-store review text only — Play Store 3,033 · App Store 339.</a:t>
+              <a:t>App-store review text only. 5,898 collected; the figures here describe the 3,372 analysed.</a:t>
             </a:r>
             <a:endParaRPr lang="en-US" sz="1400" dirty="0"/>
           </a:p>
